--- a/courseware/202609_ADS_W05_October_Exam_Review.pptx
+++ b/courseware/202609_ADS_W05_October_Exam_Review.pptx
@@ -6230,7 +6230,7 @@
                 <a:ea typeface="Microsoft YaHei" pitchFamily="34" charset="-122"/>
                 <a:cs typeface="Microsoft YaHei" pitchFamily="34" charset="-120"/>
               </a:rPr>
-              <a:t>T1</a:t>
+              <a:t>E29895</a:t>
             </a:r>
             <a:endParaRPr lang="en-US" sz="1300" dirty="0"/>
           </a:p>
@@ -6308,7 +6308,7 @@
                 <a:ea typeface="Microsoft YaHei" pitchFamily="34" charset="-122"/>
                 <a:cs typeface="Microsoft YaHei" pitchFamily="34" charset="-120"/>
               </a:rPr>
-              <a:t>签到：读入与格式化输出</a:t>
+              <a:t>分解因数 · 试除</a:t>
             </a:r>
             <a:endParaRPr lang="en-US" sz="1250" dirty="0"/>
           </a:p>
@@ -6369,7 +6369,7 @@
                 <a:ea typeface="Microsoft YaHei" pitchFamily="34" charset="-122"/>
                 <a:cs typeface="Microsoft YaHei" pitchFamily="34" charset="-120"/>
               </a:rPr>
-              <a:t>95% 应 AC</a:t>
+              <a:t>真实题</a:t>
             </a:r>
             <a:endParaRPr lang="en-US" sz="1100" dirty="0"/>
           </a:p>
@@ -6430,7 +6430,7 @@
                 <a:ea typeface="Microsoft YaHei" pitchFamily="34" charset="-122"/>
                 <a:cs typeface="Microsoft YaHei" pitchFamily="34" charset="-120"/>
               </a:rPr>
-              <a:t>T2</a:t>
+              <a:t>E29940</a:t>
             </a:r>
             <a:endParaRPr lang="en-US" sz="1300" dirty="0"/>
           </a:p>
@@ -6508,7 +6508,7 @@
                 <a:ea typeface="Microsoft YaHei" pitchFamily="34" charset="-122"/>
                 <a:cs typeface="Microsoft YaHei" pitchFamily="34" charset="-120"/>
               </a:rPr>
-              <a:t>字符串处理</a:t>
+              <a:t>机器猫斗恶龙 · 贪心</a:t>
             </a:r>
             <a:endParaRPr lang="en-US" sz="1250" dirty="0"/>
           </a:p>
@@ -6569,7 +6569,7 @@
                 <a:ea typeface="Microsoft YaHei" pitchFamily="34" charset="-122"/>
                 <a:cs typeface="Microsoft YaHei" pitchFamily="34" charset="-120"/>
               </a:rPr>
-              <a:t>75% AC</a:t>
+              <a:t>真实题</a:t>
             </a:r>
             <a:endParaRPr lang="en-US" sz="1100" dirty="0"/>
           </a:p>
@@ -6630,7 +6630,7 @@
                 <a:ea typeface="Microsoft YaHei" pitchFamily="34" charset="-122"/>
                 <a:cs typeface="Microsoft YaHei" pitchFamily="34" charset="-120"/>
               </a:rPr>
-              <a:t>T3</a:t>
+              <a:t>M29917</a:t>
             </a:r>
             <a:endParaRPr lang="en-US" sz="1300" dirty="0"/>
           </a:p>
@@ -6708,7 +6708,7 @@
                 <a:ea typeface="Microsoft YaHei" pitchFamily="34" charset="-122"/>
                 <a:cs typeface="Microsoft YaHei" pitchFamily="34" charset="-120"/>
               </a:rPr>
-              <a:t>字典 / 排序 + 多关键字</a:t>
+              <a:t>牛顿迭代法 · 浮点</a:t>
             </a:r>
             <a:endParaRPr lang="en-US" sz="1250" dirty="0"/>
           </a:p>
@@ -6769,7 +6769,7 @@
                 <a:ea typeface="Microsoft YaHei" pitchFamily="34" charset="-122"/>
                 <a:cs typeface="Microsoft YaHei" pitchFamily="34" charset="-120"/>
               </a:rPr>
-              <a:t>55% AC</a:t>
+              <a:t>真实题</a:t>
             </a:r>
             <a:endParaRPr lang="en-US" sz="1100" dirty="0"/>
           </a:p>
@@ -6830,7 +6830,7 @@
                 <a:ea typeface="Microsoft YaHei" pitchFamily="34" charset="-122"/>
                 <a:cs typeface="Microsoft YaHei" pitchFamily="34" charset="-120"/>
               </a:rPr>
-              <a:t>T4</a:t>
+              <a:t>M29918</a:t>
             </a:r>
             <a:endParaRPr lang="en-US" sz="1300" dirty="0"/>
           </a:p>
@@ -6908,7 +6908,7 @@
                 <a:ea typeface="Microsoft YaHei" pitchFamily="34" charset="-122"/>
                 <a:cs typeface="Microsoft YaHei" pitchFamily="34" charset="-120"/>
               </a:rPr>
-              <a:t>复杂度意识：必须用筛或前缀和</a:t>
+              <a:t>求亲和数 · 数论</a:t>
             </a:r>
             <a:endParaRPr lang="en-US" sz="1250" dirty="0"/>
           </a:p>
@@ -6969,7 +6969,7 @@
                 <a:ea typeface="Microsoft YaHei" pitchFamily="34" charset="-122"/>
                 <a:cs typeface="Microsoft YaHei" pitchFamily="34" charset="-120"/>
               </a:rPr>
-              <a:t>45% AC</a:t>
+              <a:t>真实题</a:t>
             </a:r>
             <a:endParaRPr lang="en-US" sz="1100" dirty="0"/>
           </a:p>
@@ -7030,7 +7030,7 @@
                 <a:ea typeface="Microsoft YaHei" pitchFamily="34" charset="-122"/>
                 <a:cs typeface="Microsoft YaHei" pitchFamily="34" charset="-120"/>
               </a:rPr>
-              <a:t>T5</a:t>
+              <a:t>M29949</a:t>
             </a:r>
             <a:endParaRPr lang="en-US" sz="1300" dirty="0"/>
           </a:p>
@@ -7108,7 +7108,7 @@
                 <a:ea typeface="Microsoft YaHei" pitchFamily="34" charset="-122"/>
                 <a:cs typeface="Microsoft YaHei" pitchFamily="34" charset="-120"/>
               </a:rPr>
-              <a:t>综合模拟，边界多</a:t>
+              <a:t>贪婪的哥布林 · 分数背包</a:t>
             </a:r>
             <a:endParaRPr lang="en-US" sz="1250" dirty="0"/>
           </a:p>
@@ -7169,7 +7169,7 @@
                 <a:ea typeface="Microsoft YaHei" pitchFamily="34" charset="-122"/>
                 <a:cs typeface="Microsoft YaHei" pitchFamily="34" charset="-120"/>
               </a:rPr>
-              <a:t>25% AC</a:t>
+              <a:t>真实题</a:t>
             </a:r>
             <a:endParaRPr lang="en-US" sz="1100" dirty="0"/>
           </a:p>
@@ -7230,7 +7230,7 @@
                 <a:ea typeface="Microsoft YaHei" pitchFamily="34" charset="-122"/>
                 <a:cs typeface="Microsoft YaHei" pitchFamily="34" charset="-120"/>
               </a:rPr>
-              <a:t>T6</a:t>
+              <a:t>T29947</a:t>
             </a:r>
             <a:endParaRPr lang="en-US" sz="1300" dirty="0"/>
           </a:p>
@@ -7308,7 +7308,7 @@
                 <a:ea typeface="Microsoft YaHei" pitchFamily="34" charset="-122"/>
                 <a:cs typeface="Microsoft YaHei" pitchFamily="34" charset="-120"/>
               </a:rPr>
-              <a:t>补码 / 位运算，符号边界密集</a:t>
+              <a:t>校门外的树又来了 · 区间</a:t>
             </a:r>
             <a:endParaRPr lang="en-US" sz="1250" dirty="0"/>
           </a:p>
@@ -7369,7 +7369,7 @@
                 <a:ea typeface="Microsoft YaHei" pitchFamily="34" charset="-122"/>
                 <a:cs typeface="Microsoft YaHei" pitchFamily="34" charset="-120"/>
               </a:rPr>
-              <a:t>20% AC</a:t>
+              <a:t>真实题</a:t>
             </a:r>
             <a:endParaRPr lang="en-US" sz="1100" dirty="0"/>
           </a:p>

--- a/courseware/202609_ADS_W05_October_Exam_Review.pptx
+++ b/courseware/202609_ADS_W05_October_Exam_Review.pptx
@@ -27497,7 +27497,7 @@
                           <a:ea typeface="Microsoft YaHei" pitchFamily="34" charset="-122"/>
                           <a:cs typeface="Microsoft YaHei" pitchFamily="34" charset="-120"/>
                         </a:rPr>
-                        <a:t>一页 A4，双面，手写</a:t>
+                        <a:t>十页 A4，双面，手写或打印</a:t>
                       </a:r>
                       <a:endParaRPr lang="en-US" sz="1300" dirty="0">
                         <a:latin typeface="Microsoft YaHei" charset="0"/>
@@ -30699,7 +30699,7 @@
                           <a:ea typeface="Microsoft YaHei" pitchFamily="34" charset="-122"/>
                           <a:cs typeface="Microsoft YaHei" pitchFamily="34" charset="-120"/>
                         </a:rPr>
-                        <a:t>一页 A4 手写 cheat sheet</a:t>
+                        <a:t>十页 A4，双面，手写或打印 cheat sheet</a:t>
                       </a:r>
                       <a:endParaRPr lang="en-US" sz="1300" dirty="0">
                         <a:latin typeface="Microsoft YaHei" charset="0"/>
@@ -30863,7 +30863,7 @@
                 <a:ea typeface="Microsoft YaHei" pitchFamily="34" charset="-122"/>
                 <a:cs typeface="Microsoft YaHei" pitchFamily="34" charset="-120"/>
               </a:rPr>
-              <a:t>（含本地模型、IDE 智能补全插件）、联网查询、任何形式的交流。</a:t>
+              <a:t>（含本地模型）、联网查询、任何形式的交流。</a:t>
             </a:r>
             <a:endParaRPr lang="en-US" sz="1200" dirty="0"/>
           </a:p>

--- a/courseware/202609_ADS_W05_October_Exam_Review.pptx
+++ b/courseware/202609_ADS_W05_October_Exam_Review.pptx
@@ -5859,6 +5859,17 @@
               <a:buNone/>
             </a:pPr>
             <a:r>
+              <a:rPr lang="en-US" sz="1200" dirty="0">
+                <a:solidFill>
+                  <a:srgbClr val="2B2B2B"/>
+                </a:solidFill>
+                <a:latin typeface="Microsoft YaHei" pitchFamily="34" charset="0"/>
+                <a:ea typeface="Microsoft YaHei" pitchFamily="34" charset="-122"/>
+                <a:cs typeface="Microsoft YaHei" pitchFamily="34" charset="-120"/>
+              </a:rPr>
+              <a:t>元组先比 </a:t>
+            </a:r>
+            <a:r>
               <a:rPr lang="en-US" sz="1200" b="1" dirty="0">
                 <a:solidFill>
                   <a:srgbClr val="3E7C68"/>
@@ -5867,7 +5878,7 @@
                 <a:ea typeface="Consolas" pitchFamily="34" charset="-122"/>
                 <a:cs typeface="Consolas" pitchFamily="34" charset="-120"/>
               </a:rPr>
-              <a:t>-kv[1]</a:t>
+              <a:t>r[1]</a:t>
             </a:r>
             <a:r>
               <a:rPr lang="en-US" sz="1200" dirty="0">
@@ -5878,7 +5889,7 @@
                 <a:ea typeface="Microsoft YaHei" pitchFamily="34" charset="-122"/>
                 <a:cs typeface="Microsoft YaHei" pitchFamily="34" charset="-120"/>
               </a:rPr>
-              <a:t> 让「按次数降序」也能用 </a:t>
+              <a:t>（升序），相等再比 </a:t>
             </a:r>
             <a:r>
               <a:rPr lang="en-US" sz="1200" b="1" dirty="0">
@@ -5889,6 +5900,28 @@
                 <a:ea typeface="Consolas" pitchFamily="34" charset="-122"/>
                 <a:cs typeface="Consolas" pitchFamily="34" charset="-120"/>
               </a:rPr>
+              <a:t>-r[0]</a:t>
+            </a:r>
+            <a:r>
+              <a:rPr lang="en-US" sz="1200" dirty="0">
+                <a:solidFill>
+                  <a:srgbClr val="2B2B2B"/>
+                </a:solidFill>
+                <a:latin typeface="Microsoft YaHei" pitchFamily="34" charset="0"/>
+                <a:ea typeface="Microsoft YaHei" pitchFamily="34" charset="-122"/>
+                <a:cs typeface="Microsoft YaHei" pitchFamily="34" charset="-120"/>
+              </a:rPr>
+              <a:t>——第 1 项取负，</a:t>
+            </a:r>
+            <a:r>
+              <a:rPr lang="en-US" sz="1200" b="1" dirty="0">
+                <a:solidFill>
+                  <a:srgbClr val="3E7C68"/>
+                </a:solidFill>
+                <a:latin typeface="Consolas" pitchFamily="34" charset="0"/>
+                <a:ea typeface="Consolas" pitchFamily="34" charset="-122"/>
+                <a:cs typeface="Consolas" pitchFamily="34" charset="-120"/>
+              </a:rPr>
               <a:t>sort()</a:t>
             </a:r>
             <a:r>
@@ -5900,7 +5933,7 @@
                 <a:ea typeface="Microsoft YaHei" pitchFamily="34" charset="-122"/>
                 <a:cs typeface="Microsoft YaHei" pitchFamily="34" charset="-120"/>
               </a:rPr>
-              <a:t> 的默认升序实现——数值取负，字符串没法取负，所以字典序仍升序、次数用负号降序，两个方向一次搞定。</a:t>
+              <a:t> 的默认升序就变成了降序，两个方向一次搞定。只有数值能取负，字符串要降序得另想办法。</a:t>
             </a:r>
             <a:endParaRPr lang="en-US" sz="1200" dirty="0"/>
           </a:p>
